--- a/Мессенджер rugram.pptx
+++ b/Мессенджер rugram.pptx
@@ -266,7 +266,7 @@
           <a:p>
             <a:fld id="{109AB7AA-1744-44D7-B695-6145F9D5A149}" type="datetimeFigureOut">
               <a:rPr lang="ru-RU" smtClean="0"/>
-              <a:t>02.03.2026</a:t>
+              <a:t>11.03.2026</a:t>
             </a:fld>
             <a:endParaRPr lang="ru-RU" dirty="0"/>
           </a:p>
@@ -467,7 +467,7 @@
           <a:p>
             <a:fld id="{109AB7AA-1744-44D7-B695-6145F9D5A149}" type="datetimeFigureOut">
               <a:rPr lang="ru-RU" smtClean="0"/>
-              <a:t>02.03.2026</a:t>
+              <a:t>11.03.2026</a:t>
             </a:fld>
             <a:endParaRPr lang="ru-RU" dirty="0"/>
           </a:p>
@@ -678,7 +678,7 @@
           <a:p>
             <a:fld id="{109AB7AA-1744-44D7-B695-6145F9D5A149}" type="datetimeFigureOut">
               <a:rPr lang="ru-RU" smtClean="0"/>
-              <a:t>02.03.2026</a:t>
+              <a:t>11.03.2026</a:t>
             </a:fld>
             <a:endParaRPr lang="ru-RU" dirty="0"/>
           </a:p>
@@ -879,7 +879,7 @@
           <a:p>
             <a:fld id="{109AB7AA-1744-44D7-B695-6145F9D5A149}" type="datetimeFigureOut">
               <a:rPr lang="ru-RU" smtClean="0"/>
-              <a:t>02.03.2026</a:t>
+              <a:t>11.03.2026</a:t>
             </a:fld>
             <a:endParaRPr lang="ru-RU" dirty="0"/>
           </a:p>
@@ -1157,7 +1157,7 @@
           <a:p>
             <a:fld id="{109AB7AA-1744-44D7-B695-6145F9D5A149}" type="datetimeFigureOut">
               <a:rPr lang="ru-RU" smtClean="0"/>
-              <a:t>02.03.2026</a:t>
+              <a:t>11.03.2026</a:t>
             </a:fld>
             <a:endParaRPr lang="ru-RU" dirty="0"/>
           </a:p>
@@ -1425,7 +1425,7 @@
           <a:p>
             <a:fld id="{109AB7AA-1744-44D7-B695-6145F9D5A149}" type="datetimeFigureOut">
               <a:rPr lang="ru-RU" smtClean="0"/>
-              <a:t>02.03.2026</a:t>
+              <a:t>11.03.2026</a:t>
             </a:fld>
             <a:endParaRPr lang="ru-RU" dirty="0"/>
           </a:p>
@@ -1840,7 +1840,7 @@
           <a:p>
             <a:fld id="{109AB7AA-1744-44D7-B695-6145F9D5A149}" type="datetimeFigureOut">
               <a:rPr lang="ru-RU" smtClean="0"/>
-              <a:t>02.03.2026</a:t>
+              <a:t>11.03.2026</a:t>
             </a:fld>
             <a:endParaRPr lang="ru-RU" dirty="0"/>
           </a:p>
@@ -1984,7 +1984,7 @@
           <a:p>
             <a:fld id="{109AB7AA-1744-44D7-B695-6145F9D5A149}" type="datetimeFigureOut">
               <a:rPr lang="ru-RU" smtClean="0"/>
-              <a:t>02.03.2026</a:t>
+              <a:t>11.03.2026</a:t>
             </a:fld>
             <a:endParaRPr lang="ru-RU" dirty="0"/>
           </a:p>
@@ -2100,7 +2100,7 @@
           <a:p>
             <a:fld id="{109AB7AA-1744-44D7-B695-6145F9D5A149}" type="datetimeFigureOut">
               <a:rPr lang="ru-RU" smtClean="0"/>
-              <a:t>02.03.2026</a:t>
+              <a:t>11.03.2026</a:t>
             </a:fld>
             <a:endParaRPr lang="ru-RU" dirty="0"/>
           </a:p>
@@ -2414,7 +2414,7 @@
           <a:p>
             <a:fld id="{109AB7AA-1744-44D7-B695-6145F9D5A149}" type="datetimeFigureOut">
               <a:rPr lang="ru-RU" smtClean="0"/>
-              <a:t>02.03.2026</a:t>
+              <a:t>11.03.2026</a:t>
             </a:fld>
             <a:endParaRPr lang="ru-RU" dirty="0"/>
           </a:p>
@@ -2705,7 +2705,7 @@
           <a:p>
             <a:fld id="{109AB7AA-1744-44D7-B695-6145F9D5A149}" type="datetimeFigureOut">
               <a:rPr lang="ru-RU" smtClean="0"/>
-              <a:t>02.03.2026</a:t>
+              <a:t>11.03.2026</a:t>
             </a:fld>
             <a:endParaRPr lang="ru-RU" dirty="0"/>
           </a:p>
@@ -2949,7 +2949,7 @@
           <a:p>
             <a:fld id="{109AB7AA-1744-44D7-B695-6145F9D5A149}" type="datetimeFigureOut">
               <a:rPr lang="ru-RU" smtClean="0"/>
-              <a:t>02.03.2026</a:t>
+              <a:t>11.03.2026</a:t>
             </a:fld>
             <a:endParaRPr lang="ru-RU" dirty="0"/>
           </a:p>
@@ -3387,7 +3387,7 @@
         </p:nvSpPr>
         <p:spPr>
           <a:xfrm>
-            <a:off x="1524000" y="4086035"/>
+            <a:off x="1524000" y="3526277"/>
             <a:ext cx="9144000" cy="412178"/>
           </a:xfrm>
         </p:spPr>
@@ -3412,97 +3412,25 @@
           </a:p>
         </p:txBody>
       </p:sp>
-      <p:pic>
-        <p:nvPicPr>
-          <p:cNvPr id="5" name="Рисунок 4" descr="Изображение выглядит как дизайн&#10;&#10;Содержимое, созданное искусственным интеллектом, может быть неверным.">
-            <a:extLst>
-              <a:ext uri="{FF2B5EF4-FFF2-40B4-BE49-F238E27FC236}">
-                <a16:creationId xmlns:a16="http://schemas.microsoft.com/office/drawing/2014/main" id="{1D899F1C-BA2E-1D44-9B98-C0886D7A5815}"/>
-              </a:ext>
-            </a:extLst>
-          </p:cNvPr>
-          <p:cNvPicPr>
-            <a:picLocks noChangeAspect="1"/>
-          </p:cNvPicPr>
-          <p:nvPr/>
-        </p:nvPicPr>
-        <p:blipFill>
-          <a:blip r:embed="rId2">
-            <a:alphaModFix/>
-            <a:duotone>
-              <a:schemeClr val="accent2">
-                <a:shade val="45000"/>
-                <a:satMod val="135000"/>
-              </a:schemeClr>
-              <a:prstClr val="white"/>
-            </a:duotone>
-            <a:extLst>
-              <a:ext uri="{BEBA8EAE-BF5A-486C-A8C5-ECC9F3942E4B}">
-                <a14:imgProps xmlns:a14="http://schemas.microsoft.com/office/drawing/2010/main">
-                  <a14:imgLayer r:embed="rId3">
-                    <a14:imgEffect>
-                      <a14:colorTemperature colorTemp="11200"/>
-                    </a14:imgEffect>
-                    <a14:imgEffect>
-                      <a14:saturation sat="400000"/>
-                    </a14:imgEffect>
-                    <a14:imgEffect>
-                      <a14:brightnessContrast bright="-3000" contrast="-20000"/>
-                    </a14:imgEffect>
-                  </a14:imgLayer>
-                </a14:imgProps>
-              </a:ext>
-              <a:ext uri="{28A0092B-C50C-407E-A947-70E740481C1C}">
-                <a14:useLocalDpi xmlns:a14="http://schemas.microsoft.com/office/drawing/2010/main" val="0"/>
-              </a:ext>
-            </a:extLst>
-          </a:blip>
-          <a:stretch>
-            <a:fillRect/>
-          </a:stretch>
-        </p:blipFill>
+      <p:sp>
+        <p:nvSpPr>
+          <p:cNvPr id="2" name="Заголовок 1">
+            <a:extLst>
+              <a:ext uri="{FF2B5EF4-FFF2-40B4-BE49-F238E27FC236}">
+                <a16:creationId xmlns:a16="http://schemas.microsoft.com/office/drawing/2014/main" id="{9597E08A-CF38-CE4B-82D8-4164936F38E2}"/>
+              </a:ext>
+            </a:extLst>
+          </p:cNvPr>
+          <p:cNvSpPr>
+            <a:spLocks noGrp="1"/>
+          </p:cNvSpPr>
+          <p:nvPr>
+            <p:ph type="ctrTitle"/>
+          </p:nvPr>
+        </p:nvSpPr>
         <p:spPr>
           <a:xfrm>
-            <a:off x="5052060" y="1075944"/>
-            <a:ext cx="2087880" cy="2087880"/>
-          </a:xfrm>
-          <a:prstGeom prst="roundRect">
-            <a:avLst>
-              <a:gd name="adj" fmla="val 8594"/>
-            </a:avLst>
-          </a:prstGeom>
-          <a:solidFill>
-            <a:srgbClr val="FFFFFF">
-              <a:shade val="85000"/>
-            </a:srgbClr>
-          </a:solidFill>
-          <a:ln>
-            <a:noFill/>
-          </a:ln>
-          <a:effectLst>
-            <a:reflection blurRad="12700" stA="38000" endPos="28000" dist="5000" dir="5400000" sy="-100000" algn="bl" rotWithShape="0"/>
-          </a:effectLst>
-        </p:spPr>
-      </p:pic>
-      <p:sp>
-        <p:nvSpPr>
-          <p:cNvPr id="2" name="Заголовок 1">
-            <a:extLst>
-              <a:ext uri="{FF2B5EF4-FFF2-40B4-BE49-F238E27FC236}">
-                <a16:creationId xmlns:a16="http://schemas.microsoft.com/office/drawing/2014/main" id="{9597E08A-CF38-CE4B-82D8-4164936F38E2}"/>
-              </a:ext>
-            </a:extLst>
-          </p:cNvPr>
-          <p:cNvSpPr>
-            <a:spLocks noGrp="1"/>
-          </p:cNvSpPr>
-          <p:nvPr>
-            <p:ph type="ctrTitle"/>
-          </p:nvPr>
-        </p:nvSpPr>
-        <p:spPr>
-          <a:xfrm>
-            <a:off x="2430780" y="3163824"/>
+            <a:off x="2430780" y="2604066"/>
             <a:ext cx="7330440" cy="922211"/>
           </a:xfrm>
         </p:spPr>
@@ -3519,7 +3447,7 @@
               <a:t>Мессенджер </a:t>
             </a:r>
             <a:r>
-              <a:rPr lang="en-US" dirty="0" err="1">
+              <a:rPr lang="en-US" dirty="0">
                 <a:latin typeface="+mn-lt"/>
               </a:rPr>
               <a:t>rugram</a:t>
@@ -3766,13 +3694,21 @@
           <a:p>
             <a:r>
               <a:rPr lang="ru-RU" sz="2000" dirty="0"/>
-              <a:t>К примеру в телеграме такой тип отправки сообщений можно было включить только в защищённом чате, а у меня такой способ используется для всех чатов.</a:t>
-            </a:r>
-          </a:p>
-          <a:p>
+              <a:t>К примеру в том</a:t>
+            </a:r>
+            <a:r>
+              <a:rPr lang="en-US" sz="2000" dirty="0"/>
+              <a:t> </a:t>
+            </a:r>
             <a:r>
               <a:rPr lang="ru-RU" sz="2000" dirty="0"/>
-              <a:t>А также будет иметь встроенного ИИ помощника</a:t>
+              <a:t>же телеграме такой тип отправки сообщений можно было включить только в защищённом чате, а у меня такой способ используется для всех чатов.</a:t>
+            </a:r>
+          </a:p>
+          <a:p>
+            <a:r>
+              <a:rPr lang="ru-RU" sz="2000" dirty="0"/>
+              <a:t>А также будет иметь встроенного ИИ помощника (пока не начинал, приоритет работа приложения)</a:t>
             </a:r>
           </a:p>
           <a:p>
@@ -3819,6 +3755,42 @@
           <a:chExt cx="0" cy="0"/>
         </a:xfrm>
       </p:grpSpPr>
+      <p:pic>
+        <p:nvPicPr>
+          <p:cNvPr id="17" name="Рисунок 16">
+            <a:extLst>
+              <a:ext uri="{FF2B5EF4-FFF2-40B4-BE49-F238E27FC236}">
+                <a16:creationId xmlns:a16="http://schemas.microsoft.com/office/drawing/2014/main" id="{2D2F3D66-4687-A992-F528-357E39FBD36D}"/>
+              </a:ext>
+            </a:extLst>
+          </p:cNvPr>
+          <p:cNvPicPr>
+            <a:picLocks noChangeAspect="1"/>
+          </p:cNvPicPr>
+          <p:nvPr/>
+        </p:nvPicPr>
+        <p:blipFill>
+          <a:blip r:embed="rId2">
+            <a:extLst>
+              <a:ext uri="{28A0092B-C50C-407E-A947-70E740481C1C}">
+                <a14:useLocalDpi xmlns:a14="http://schemas.microsoft.com/office/drawing/2010/main" val="0"/>
+              </a:ext>
+            </a:extLst>
+          </a:blip>
+          <a:stretch>
+            <a:fillRect/>
+          </a:stretch>
+        </p:blipFill>
+        <p:spPr>
+          <a:xfrm>
+            <a:off x="7976977" y="3590789"/>
+            <a:ext cx="2325111" cy="1307875"/>
+          </a:xfrm>
+          <a:prstGeom prst="rect">
+            <a:avLst/>
+          </a:prstGeom>
+        </p:spPr>
+      </p:pic>
       <p:sp>
         <p:nvSpPr>
           <p:cNvPr id="2" name="Заголовок 1">
@@ -4013,20 +3985,24 @@
               <a:t>, </a:t>
             </a:r>
             <a:r>
-              <a:rPr lang="en-US" sz="2200" dirty="0" err="1"/>
-              <a:t>localhost.run</a:t>
-            </a:r>
-            <a:r>
               <a:rPr lang="en-US" sz="2200" dirty="0"/>
-              <a:t>, git</a:t>
+              <a:t>localhost.run, git</a:t>
             </a:r>
             <a:r>
               <a:rPr lang="ru-RU" sz="2200" dirty="0"/>
               <a:t>, </a:t>
             </a:r>
             <a:r>
-              <a:rPr lang="en-US" sz="2200" dirty="0" err="1"/>
+              <a:rPr lang="en-US" sz="2200" dirty="0"/>
               <a:t>github</a:t>
+            </a:r>
+            <a:r>
+              <a:rPr lang="ru-RU" sz="2200" dirty="0"/>
+              <a:t>, </a:t>
+            </a:r>
+            <a:r>
+              <a:rPr lang="en-US" sz="2200" dirty="0"/>
+              <a:t>vercel</a:t>
             </a:r>
             <a:endParaRPr lang="ru-RU" sz="2200" dirty="0"/>
           </a:p>
@@ -4050,11 +4026,11 @@
           <p:nvPr/>
         </p:nvPicPr>
         <p:blipFill>
-          <a:blip r:embed="rId2">
+          <a:blip r:embed="rId3">
             <a:extLst>
               <a:ext uri="{BEBA8EAE-BF5A-486C-A8C5-ECC9F3942E4B}">
                 <a14:imgProps xmlns:a14="http://schemas.microsoft.com/office/drawing/2010/main">
-                  <a14:imgLayer r:embed="rId3">
+                  <a14:imgLayer r:embed="rId4">
                     <a14:imgEffect>
                       <a14:saturation sat="400000"/>
                     </a14:imgEffect>
@@ -4093,11 +4069,11 @@
           <p:nvPr/>
         </p:nvPicPr>
         <p:blipFill>
-          <a:blip r:embed="rId4">
+          <a:blip r:embed="rId5">
             <a:extLst>
               <a:ext uri="{BEBA8EAE-BF5A-486C-A8C5-ECC9F3942E4B}">
                 <a14:imgProps xmlns:a14="http://schemas.microsoft.com/office/drawing/2010/main">
-                  <a14:imgLayer r:embed="rId5">
+                  <a14:imgLayer r:embed="rId6">
                     <a14:imgEffect>
                       <a14:saturation sat="400000"/>
                     </a14:imgEffect>
@@ -4112,7 +4088,7 @@
         </p:blipFill>
         <p:spPr>
           <a:xfrm>
-            <a:off x="9734497" y="3075189"/>
+            <a:off x="9714989" y="3126824"/>
             <a:ext cx="807258" cy="807258"/>
           </a:xfrm>
           <a:prstGeom prst="rect">
@@ -4135,7 +4111,7 @@
           <p:nvPr/>
         </p:nvPicPr>
         <p:blipFill>
-          <a:blip r:embed="rId6"/>
+          <a:blip r:embed="rId7"/>
           <a:stretch>
             <a:fillRect/>
           </a:stretch>
@@ -4165,7 +4141,7 @@
           <p:nvPr/>
         </p:nvPicPr>
         <p:blipFill>
-          <a:blip r:embed="rId7"/>
+          <a:blip r:embed="rId8"/>
           <a:stretch>
             <a:fillRect/>
           </a:stretch>
@@ -4195,7 +4171,7 @@
           <p:nvPr/>
         </p:nvPicPr>
         <p:blipFill>
-          <a:blip r:embed="rId8"/>
+          <a:blip r:embed="rId9"/>
           <a:stretch>
             <a:fillRect/>
           </a:stretch>
@@ -4225,7 +4201,7 @@
           <p:nvPr/>
         </p:nvPicPr>
         <p:blipFill>
-          <a:blip r:embed="rId9"/>
+          <a:blip r:embed="rId10"/>
           <a:stretch>
             <a:fillRect/>
           </a:stretch>
@@ -4255,7 +4231,7 @@
           <p:nvPr/>
         </p:nvPicPr>
         <p:blipFill>
-          <a:blip r:embed="rId10"/>
+          <a:blip r:embed="rId11"/>
           <a:stretch>
             <a:fillRect/>
           </a:stretch>
@@ -4270,6 +4246,51 @@
           </a:prstGeom>
         </p:spPr>
       </p:pic>
+      <p:sp>
+        <p:nvSpPr>
+          <p:cNvPr id="10" name="AutoShape 2" descr="Vercel: What is it and what is it for?">
+            <a:extLst>
+              <a:ext uri="{FF2B5EF4-FFF2-40B4-BE49-F238E27FC236}">
+                <a16:creationId xmlns:a16="http://schemas.microsoft.com/office/drawing/2014/main" id="{C01D091F-B045-0F93-51BB-8C4A62969F4F}"/>
+              </a:ext>
+            </a:extLst>
+          </p:cNvPr>
+          <p:cNvSpPr>
+            <a:spLocks noChangeAspect="1" noChangeArrowheads="1"/>
+          </p:cNvSpPr>
+          <p:nvPr/>
+        </p:nvSpPr>
+        <p:spPr bwMode="auto">
+          <a:xfrm>
+            <a:off x="5943600" y="3276600"/>
+            <a:ext cx="304800" cy="304800"/>
+          </a:xfrm>
+          <a:prstGeom prst="rect">
+            <a:avLst/>
+          </a:prstGeom>
+          <a:noFill/>
+          <a:extLst>
+            <a:ext uri="{909E8E84-426E-40DD-AFC4-6F175D3DCCD1}">
+              <a14:hiddenFill xmlns:a14="http://schemas.microsoft.com/office/drawing/2010/main">
+                <a:solidFill>
+                  <a:srgbClr val="FFFFFF"/>
+                </a:solidFill>
+              </a14:hiddenFill>
+            </a:ext>
+          </a:extLst>
+        </p:spPr>
+        <p:txBody>
+          <a:bodyPr vert="horz" wrap="square" lIns="91440" tIns="45720" rIns="91440" bIns="45720" numCol="1" anchor="t" anchorCtr="0" compatLnSpc="1">
+            <a:prstTxWarp prst="textNoShape">
+              <a:avLst/>
+            </a:prstTxWarp>
+          </a:bodyPr>
+          <a:lstStyle/>
+          <a:p>
+            <a:endParaRPr lang="ru-RU" dirty="0"/>
+          </a:p>
+        </p:txBody>
+      </p:sp>
     </p:spTree>
     <p:extLst>
       <p:ext uri="{BB962C8B-B14F-4D97-AF65-F5344CB8AC3E}">
@@ -4786,15 +4807,15 @@
               </a:ext>
             </a:extLst>
           </a:blip>
-          <a:srcRect b="6341"/>
+          <a:srcRect l="19113" r="19676"/>
           <a:stretch>
             <a:fillRect/>
           </a:stretch>
         </p:blipFill>
         <p:spPr>
           <a:xfrm>
-            <a:off x="2444087" y="510264"/>
-            <a:ext cx="6261449" cy="2826766"/>
+            <a:off x="622329" y="2036655"/>
+            <a:ext cx="5172113" cy="4072910"/>
           </a:xfrm>
           <a:prstGeom prst="rect">
             <a:avLst/>
@@ -4823,15 +4844,15 @@
               </a:ext>
             </a:extLst>
           </a:blip>
-          <a:srcRect l="18849" t="1" r="19748" b="-6530"/>
+          <a:srcRect l="18849" r="19748" b="116"/>
           <a:stretch>
             <a:fillRect/>
           </a:stretch>
         </p:blipFill>
         <p:spPr>
           <a:xfrm>
-            <a:off x="7006814" y="2676683"/>
-            <a:ext cx="3648456" cy="3018155"/>
+            <a:off x="6244699" y="459921"/>
+            <a:ext cx="5545225" cy="4301055"/>
           </a:xfrm>
           <a:prstGeom prst="rect">
             <a:avLst/>
@@ -4990,6 +5011,77 @@
           </a:prstGeom>
         </p:spPr>
       </p:pic>
+      <p:sp>
+        <p:nvSpPr>
+          <p:cNvPr id="4" name="TextBox 3">
+            <a:extLst>
+              <a:ext uri="{FF2B5EF4-FFF2-40B4-BE49-F238E27FC236}">
+                <a16:creationId xmlns:a16="http://schemas.microsoft.com/office/drawing/2014/main" id="{13EC66B7-F582-8A51-A475-F00A58B0D0CF}"/>
+              </a:ext>
+            </a:extLst>
+          </p:cNvPr>
+          <p:cNvSpPr txBox="1"/>
+          <p:nvPr/>
+        </p:nvSpPr>
+        <p:spPr>
+          <a:xfrm>
+            <a:off x="4562272" y="1825625"/>
+            <a:ext cx="2643544" cy="923330"/>
+          </a:xfrm>
+          <a:prstGeom prst="rect">
+            <a:avLst/>
+          </a:prstGeom>
+          <a:noFill/>
+        </p:spPr>
+        <p:txBody>
+          <a:bodyPr wrap="none" rtlCol="0">
+            <a:spAutoFit/>
+          </a:bodyPr>
+          <a:lstStyle/>
+          <a:p>
+            <a:r>
+              <a:rPr lang="ru-RU" dirty="0"/>
+              <a:t>Ссылка</a:t>
+            </a:r>
+            <a:r>
+              <a:rPr lang="en-US" dirty="0"/>
+              <a:t>:</a:t>
+            </a:r>
+            <a:br>
+              <a:rPr lang="en-US" dirty="0"/>
+            </a:br>
+            <a:br>
+              <a:rPr lang="en-US" dirty="0"/>
+            </a:br>
+            <a:r>
+              <a:rPr lang="en-US" dirty="0">
+                <a:solidFill>
+                  <a:schemeClr val="tx2">
+                    <a:lumMod val="50000"/>
+                    <a:lumOff val="50000"/>
+                  </a:schemeClr>
+                </a:solidFill>
+                <a:hlinkClick r:id="rId3">
+                  <a:extLst>
+                    <a:ext uri="{A12FA001-AC4F-418D-AE19-62706E023703}">
+                      <ahyp:hlinkClr xmlns:ahyp="http://schemas.microsoft.com/office/drawing/2018/hyperlinkcolor" val="tx"/>
+                    </a:ext>
+                  </a:extLst>
+                </a:hlinkClick>
+              </a:rPr>
+              <a:t>hipmmiron/Rugram_files</a:t>
+            </a:r>
+            <a:endParaRPr lang="ru-RU" dirty="0">
+              <a:solidFill>
+                <a:schemeClr val="tx2">
+                  <a:lumMod val="50000"/>
+                  <a:lumOff val="50000"/>
+                </a:schemeClr>
+              </a:solidFill>
+            </a:endParaRPr>
+          </a:p>
+        </p:txBody>
+      </p:sp>
     </p:spTree>
     <p:extLst>
       <p:ext uri="{BB962C8B-B14F-4D97-AF65-F5344CB8AC3E}">
